--- a/projects/drug-information-practical/slides/ch07-adverse-drug-reactions.pptx
+++ b/projects/drug-information-practical/slides/ch07-adverse-drug-reactions.pptx
@@ -6267,7 +6267,7 @@
                     <a:lstStyle/>
                     <a:p>
                       <a:r>
-                        <a:rPr sz="1200" i="0" b="1">
+                        <a:rPr sz="1400" i="0" b="1">
                           <a:solidFill>
                             <a:srgbClr val="FFFFFF"/>
                           </a:solidFill>
@@ -6289,7 +6289,7 @@
                     <a:lstStyle/>
                     <a:p>
                       <a:r>
-                        <a:rPr sz="1200" i="0" b="1">
+                        <a:rPr sz="1400" i="0" b="1">
                           <a:solidFill>
                             <a:srgbClr val="FFFFFF"/>
                           </a:solidFill>
@@ -6313,7 +6313,7 @@
                     <a:lstStyle/>
                     <a:p>
                       <a:r>
-                        <a:rPr sz="1300" i="0" b="1">
+                        <a:rPr sz="1500" i="0" b="1">
                           <a:solidFill>
                             <a:srgbClr val="2B211C"/>
                           </a:solidFill>
@@ -6335,7 +6335,7 @@
                     <a:lstStyle/>
                     <a:p>
                       <a:r>
-                        <a:rPr sz="1300" i="0" b="0">
+                        <a:rPr sz="1500" i="0" b="0">
                           <a:solidFill>
                             <a:srgbClr val="2B211C"/>
                           </a:solidFill>
@@ -6359,7 +6359,7 @@
                     <a:lstStyle/>
                     <a:p>
                       <a:r>
-                        <a:rPr sz="1300" i="0" b="1">
+                        <a:rPr sz="1500" i="0" b="1">
                           <a:solidFill>
                             <a:srgbClr val="2B211C"/>
                           </a:solidFill>
@@ -6381,7 +6381,7 @@
                     <a:lstStyle/>
                     <a:p>
                       <a:r>
-                        <a:rPr sz="1300" i="0" b="0">
+                        <a:rPr sz="1500" i="0" b="0">
                           <a:solidFill>
                             <a:srgbClr val="2B211C"/>
                           </a:solidFill>
@@ -6405,7 +6405,7 @@
                     <a:lstStyle/>
                     <a:p>
                       <a:r>
-                        <a:rPr sz="1300" i="0" b="1">
+                        <a:rPr sz="1500" i="0" b="1">
                           <a:solidFill>
                             <a:srgbClr val="2B211C"/>
                           </a:solidFill>
@@ -6427,7 +6427,7 @@
                     <a:lstStyle/>
                     <a:p>
                       <a:r>
-                        <a:rPr sz="1300" i="0" b="0">
+                        <a:rPr sz="1500" i="0" b="0">
                           <a:solidFill>
                             <a:srgbClr val="2B211C"/>
                           </a:solidFill>
@@ -6451,7 +6451,7 @@
                     <a:lstStyle/>
                     <a:p>
                       <a:r>
-                        <a:rPr sz="1300" i="0" b="1">
+                        <a:rPr sz="1500" i="0" b="1">
                           <a:solidFill>
                             <a:srgbClr val="2B211C"/>
                           </a:solidFill>
@@ -6473,7 +6473,7 @@
                     <a:lstStyle/>
                     <a:p>
                       <a:r>
-                        <a:rPr sz="1300" i="0" b="0">
+                        <a:rPr sz="1500" i="0" b="0">
                           <a:solidFill>
                             <a:srgbClr val="2B211C"/>
                           </a:solidFill>
@@ -6497,7 +6497,7 @@
                     <a:lstStyle/>
                     <a:p>
                       <a:r>
-                        <a:rPr sz="1300" i="0" b="1">
+                        <a:rPr sz="1500" i="0" b="1">
                           <a:solidFill>
                             <a:srgbClr val="2B211C"/>
                           </a:solidFill>
@@ -6519,7 +6519,7 @@
                     <a:lstStyle/>
                     <a:p>
                       <a:r>
-                        <a:rPr sz="1300" i="0" b="0">
+                        <a:rPr sz="1500" i="0" b="0">
                           <a:solidFill>
                             <a:srgbClr val="2B211C"/>
                           </a:solidFill>
@@ -6543,7 +6543,7 @@
                     <a:lstStyle/>
                     <a:p>
                       <a:r>
-                        <a:rPr sz="1300" i="0" b="1">
+                        <a:rPr sz="1500" i="0" b="1">
                           <a:solidFill>
                             <a:srgbClr val="2B211C"/>
                           </a:solidFill>
@@ -6565,7 +6565,7 @@
                     <a:lstStyle/>
                     <a:p>
                       <a:r>
-                        <a:rPr sz="1300" i="0" b="0">
+                        <a:rPr sz="1500" i="0" b="0">
                           <a:solidFill>
                             <a:srgbClr val="2B211C"/>
                           </a:solidFill>
@@ -6589,7 +6589,7 @@
                     <a:lstStyle/>
                     <a:p>
                       <a:r>
-                        <a:rPr sz="1300" i="0" b="1">
+                        <a:rPr sz="1500" i="0" b="1">
                           <a:solidFill>
                             <a:srgbClr val="2B211C"/>
                           </a:solidFill>
@@ -6611,7 +6611,7 @@
                     <a:lstStyle/>
                     <a:p>
                       <a:r>
-                        <a:rPr sz="1300" i="0" b="0">
+                        <a:rPr sz="1500" i="0" b="0">
                           <a:solidFill>
                             <a:srgbClr val="2B211C"/>
                           </a:solidFill>
@@ -20242,7 +20242,7 @@
                     <a:lstStyle/>
                     <a:p>
                       <a:r>
-                        <a:rPr sz="1100" i="0" b="1">
+                        <a:rPr sz="1200" i="0" b="1">
                           <a:solidFill>
                             <a:srgbClr val="FFFFFF"/>
                           </a:solidFill>
@@ -20264,7 +20264,7 @@
                     <a:lstStyle/>
                     <a:p>
                       <a:r>
-                        <a:rPr sz="1100" i="0" b="1">
+                        <a:rPr sz="1200" i="0" b="1">
                           <a:solidFill>
                             <a:srgbClr val="FFFFFF"/>
                           </a:solidFill>
@@ -20286,7 +20286,7 @@
                     <a:lstStyle/>
                     <a:p>
                       <a:r>
-                        <a:rPr sz="1100" i="0" b="1">
+                        <a:rPr sz="1200" i="0" b="1">
                           <a:solidFill>
                             <a:srgbClr val="FFFFFF"/>
                           </a:solidFill>
@@ -20308,7 +20308,7 @@
                     <a:lstStyle/>
                     <a:p>
                       <a:r>
-                        <a:rPr sz="1100" i="0" b="1">
+                        <a:rPr sz="1200" i="0" b="1">
                           <a:solidFill>
                             <a:srgbClr val="FFFFFF"/>
                           </a:solidFill>
@@ -20332,7 +20332,7 @@
                     <a:lstStyle/>
                     <a:p>
                       <a:r>
-                        <a:rPr sz="1200" i="0" b="1">
+                        <a:rPr sz="1300" i="0" b="1">
                           <a:solidFill>
                             <a:srgbClr val="2B211C"/>
                           </a:solidFill>
@@ -20354,7 +20354,7 @@
                     <a:lstStyle/>
                     <a:p>
                       <a:r>
-                        <a:rPr sz="1200" i="0" b="1">
+                        <a:rPr sz="1300" i="0" b="1">
                           <a:solidFill>
                             <a:srgbClr val="2B211C"/>
                           </a:solidFill>
@@ -20376,7 +20376,7 @@
                     <a:lstStyle/>
                     <a:p>
                       <a:r>
-                        <a:rPr sz="1200" i="0" b="0">
+                        <a:rPr sz="1300" i="0" b="0">
                           <a:solidFill>
                             <a:srgbClr val="2B211C"/>
                           </a:solidFill>
@@ -20398,7 +20398,7 @@
                     <a:lstStyle/>
                     <a:p>
                       <a:r>
-                        <a:rPr sz="1200" i="0" b="0">
+                        <a:rPr sz="1300" i="0" b="0">
                           <a:solidFill>
                             <a:srgbClr val="2B211C"/>
                           </a:solidFill>
@@ -20422,7 +20422,7 @@
                     <a:lstStyle/>
                     <a:p>
                       <a:r>
-                        <a:rPr sz="1200" i="0" b="1">
+                        <a:rPr sz="1300" i="0" b="1">
                           <a:solidFill>
                             <a:srgbClr val="2B211C"/>
                           </a:solidFill>
@@ -20444,7 +20444,7 @@
                     <a:lstStyle/>
                     <a:p>
                       <a:r>
-                        <a:rPr sz="1200" i="0" b="1">
+                        <a:rPr sz="1300" i="0" b="1">
                           <a:solidFill>
                             <a:srgbClr val="2B211C"/>
                           </a:solidFill>
@@ -20466,7 +20466,7 @@
                     <a:lstStyle/>
                     <a:p>
                       <a:r>
-                        <a:rPr sz="1200" i="0" b="0">
+                        <a:rPr sz="1300" i="0" b="0">
                           <a:solidFill>
                             <a:srgbClr val="2B211C"/>
                           </a:solidFill>
@@ -20488,7 +20488,7 @@
                     <a:lstStyle/>
                     <a:p>
                       <a:r>
-                        <a:rPr sz="1200" i="0" b="0">
+                        <a:rPr sz="1300" i="0" b="0">
                           <a:solidFill>
                             <a:srgbClr val="2B211C"/>
                           </a:solidFill>
@@ -20512,7 +20512,7 @@
                     <a:lstStyle/>
                     <a:p>
                       <a:r>
-                        <a:rPr sz="1200" i="0" b="1">
+                        <a:rPr sz="1300" i="0" b="1">
                           <a:solidFill>
                             <a:srgbClr val="2B211C"/>
                           </a:solidFill>
@@ -20534,7 +20534,7 @@
                     <a:lstStyle/>
                     <a:p>
                       <a:r>
-                        <a:rPr sz="1200" i="0" b="1">
+                        <a:rPr sz="1300" i="0" b="1">
                           <a:solidFill>
                             <a:srgbClr val="2B211C"/>
                           </a:solidFill>
@@ -20556,7 +20556,7 @@
                     <a:lstStyle/>
                     <a:p>
                       <a:r>
-                        <a:rPr sz="1200" i="0" b="0">
+                        <a:rPr sz="1300" i="0" b="0">
                           <a:solidFill>
                             <a:srgbClr val="2B211C"/>
                           </a:solidFill>
@@ -20565,7 +20565,7 @@
                         <a:t>Related to dose </a:t>
                       </a:r>
                       <a:r>
-                        <a:rPr sz="1200" i="0" b="1">
+                        <a:rPr sz="1300" i="0" b="1">
                           <a:solidFill>
                             <a:srgbClr val="2B211C"/>
                           </a:solidFill>
@@ -20574,7 +20574,7 @@
                         <a:t>and</a:t>
                       </a:r>
                       <a:r>
-                        <a:rPr sz="1200" i="0" b="0">
+                        <a:rPr sz="1300" i="0" b="0">
                           <a:solidFill>
                             <a:srgbClr val="2B211C"/>
                           </a:solidFill>
@@ -20596,7 +20596,7 @@
                     <a:lstStyle/>
                     <a:p>
                       <a:r>
-                        <a:rPr sz="1200" i="0" b="0">
+                        <a:rPr sz="1300" i="0" b="0">
                           <a:solidFill>
                             <a:srgbClr val="2B211C"/>
                           </a:solidFill>
@@ -20620,7 +20620,7 @@
                     <a:lstStyle/>
                     <a:p>
                       <a:r>
-                        <a:rPr sz="1200" i="0" b="1">
+                        <a:rPr sz="1300" i="0" b="1">
                           <a:solidFill>
                             <a:srgbClr val="2B211C"/>
                           </a:solidFill>
@@ -20642,7 +20642,7 @@
                     <a:lstStyle/>
                     <a:p>
                       <a:r>
-                        <a:rPr sz="1200" i="0" b="1">
+                        <a:rPr sz="1300" i="0" b="1">
                           <a:solidFill>
                             <a:srgbClr val="2B211C"/>
                           </a:solidFill>
@@ -20664,7 +20664,7 @@
                     <a:lstStyle/>
                     <a:p>
                       <a:r>
-                        <a:rPr sz="1200" i="0" b="0">
+                        <a:rPr sz="1300" i="0" b="0">
                           <a:solidFill>
                             <a:srgbClr val="2B211C"/>
                           </a:solidFill>
@@ -20686,7 +20686,7 @@
                     <a:lstStyle/>
                     <a:p>
                       <a:r>
-                        <a:rPr sz="1200" i="0" b="0">
+                        <a:rPr sz="1300" i="0" b="0">
                           <a:solidFill>
                             <a:srgbClr val="2B211C"/>
                           </a:solidFill>
@@ -20710,7 +20710,7 @@
                     <a:lstStyle/>
                     <a:p>
                       <a:r>
-                        <a:rPr sz="1200" i="0" b="1">
+                        <a:rPr sz="1300" i="0" b="1">
                           <a:solidFill>
                             <a:srgbClr val="2B211C"/>
                           </a:solidFill>
@@ -20732,7 +20732,7 @@
                     <a:lstStyle/>
                     <a:p>
                       <a:r>
-                        <a:rPr sz="1200" i="0" b="1">
+                        <a:rPr sz="1300" i="0" b="1">
                           <a:solidFill>
                             <a:srgbClr val="2B211C"/>
                           </a:solidFill>
@@ -20754,7 +20754,7 @@
                     <a:lstStyle/>
                     <a:p>
                       <a:r>
-                        <a:rPr sz="1200" i="0" b="0">
+                        <a:rPr sz="1300" i="0" b="0">
                           <a:solidFill>
                             <a:srgbClr val="2B211C"/>
                           </a:solidFill>
@@ -20776,7 +20776,7 @@
                     <a:lstStyle/>
                     <a:p>
                       <a:r>
-                        <a:rPr sz="1200" i="0" b="0">
+                        <a:rPr sz="1300" i="0" b="0">
                           <a:solidFill>
                             <a:srgbClr val="2B211C"/>
                           </a:solidFill>
@@ -20800,7 +20800,7 @@
                     <a:lstStyle/>
                     <a:p>
                       <a:r>
-                        <a:rPr sz="1200" i="0" b="1">
+                        <a:rPr sz="1300" i="0" b="1">
                           <a:solidFill>
                             <a:srgbClr val="2B211C"/>
                           </a:solidFill>
@@ -20822,7 +20822,7 @@
                     <a:lstStyle/>
                     <a:p>
                       <a:r>
-                        <a:rPr sz="1200" i="0" b="1">
+                        <a:rPr sz="1300" i="0" b="1">
                           <a:solidFill>
                             <a:srgbClr val="2B211C"/>
                           </a:solidFill>
@@ -20844,7 +20844,7 @@
                     <a:lstStyle/>
                     <a:p>
                       <a:r>
-                        <a:rPr sz="1200" i="0" b="0">
+                        <a:rPr sz="1300" i="0" b="0">
                           <a:solidFill>
                             <a:srgbClr val="2B211C"/>
                           </a:solidFill>
@@ -20866,7 +20866,7 @@
                     <a:lstStyle/>
                     <a:p>
                       <a:r>
-                        <a:rPr sz="1200" i="0" b="0">
+                        <a:rPr sz="1300" i="0" b="0">
                           <a:solidFill>
                             <a:srgbClr val="2B211C"/>
                           </a:solidFill>

--- a/projects/drug-information-practical/slides/ch07-adverse-drug-reactions.pptx
+++ b/projects/drug-information-practical/slides/ch07-adverse-drug-reactions.pptx
@@ -5564,7 +5564,7 @@
     <p:bg>
       <p:bgPr>
         <a:solidFill>
-          <a:srgbClr val="FFFFFF"/>
+          <a:srgbClr val="F5EDE3"/>
         </a:solidFill>
         <a:effectLst/>
       </p:bgPr>
@@ -5939,7 +5939,7 @@
     <p:bg>
       <p:bgPr>
         <a:solidFill>
-          <a:srgbClr val="FFFFFF"/>
+          <a:srgbClr val="F5EDE3"/>
         </a:solidFill>
         <a:effectLst/>
       </p:bgPr>
@@ -6646,7 +6646,7 @@
     <p:bg>
       <p:bgPr>
         <a:solidFill>
-          <a:srgbClr val="FFFFFF"/>
+          <a:srgbClr val="F5EDE3"/>
         </a:solidFill>
         <a:effectLst/>
       </p:bgPr>
@@ -7021,7 +7021,7 @@
     <p:bg>
       <p:bgPr>
         <a:solidFill>
-          <a:srgbClr val="FFFFFF"/>
+          <a:srgbClr val="F5EDE3"/>
         </a:solidFill>
         <a:effectLst/>
       </p:bgPr>
@@ -7297,7 +7297,7 @@
     <p:bg>
       <p:bgPr>
         <a:solidFill>
-          <a:srgbClr val="FFFFFF"/>
+          <a:srgbClr val="F5EDE3"/>
         </a:solidFill>
         <a:effectLst/>
       </p:bgPr>
@@ -8103,7 +8103,7 @@
     <p:bg>
       <p:bgPr>
         <a:solidFill>
-          <a:srgbClr val="FFFFFF"/>
+          <a:srgbClr val="F5EDE3"/>
         </a:solidFill>
         <a:effectLst/>
       </p:bgPr>
@@ -8952,7 +8952,7 @@
     <p:bg>
       <p:bgPr>
         <a:solidFill>
-          <a:srgbClr val="FFFFFF"/>
+          <a:srgbClr val="F5EDE3"/>
         </a:solidFill>
         <a:effectLst/>
       </p:bgPr>
@@ -9758,7 +9758,7 @@
     <p:bg>
       <p:bgPr>
         <a:solidFill>
-          <a:srgbClr val="FFFFFF"/>
+          <a:srgbClr val="F5EDE3"/>
         </a:solidFill>
         <a:effectLst/>
       </p:bgPr>
@@ -10607,7 +10607,7 @@
     <p:bg>
       <p:bgPr>
         <a:solidFill>
-          <a:srgbClr val="FFFFFF"/>
+          <a:srgbClr val="F5EDE3"/>
         </a:solidFill>
         <a:effectLst/>
       </p:bgPr>
@@ -11413,7 +11413,7 @@
     <p:bg>
       <p:bgPr>
         <a:solidFill>
-          <a:srgbClr val="FFFFFF"/>
+          <a:srgbClr val="F5EDE3"/>
         </a:solidFill>
         <a:effectLst/>
       </p:bgPr>
@@ -12262,7 +12262,7 @@
     <p:bg>
       <p:bgPr>
         <a:solidFill>
-          <a:srgbClr val="FFFFFF"/>
+          <a:srgbClr val="F5EDE3"/>
         </a:solidFill>
         <a:effectLst/>
       </p:bgPr>
@@ -13000,7 +13000,7 @@
     <p:bg>
       <p:bgPr>
         <a:solidFill>
-          <a:srgbClr val="FFFFFF"/>
+          <a:srgbClr val="F5EDE3"/>
         </a:solidFill>
         <a:effectLst/>
       </p:bgPr>
@@ -13806,7 +13806,7 @@
     <p:bg>
       <p:bgPr>
         <a:solidFill>
-          <a:srgbClr val="FFFFFF"/>
+          <a:srgbClr val="F5EDE3"/>
         </a:solidFill>
         <a:effectLst/>
       </p:bgPr>
@@ -14655,7 +14655,7 @@
     <p:bg>
       <p:bgPr>
         <a:solidFill>
-          <a:srgbClr val="FFFFFF"/>
+          <a:srgbClr val="F5EDE3"/>
         </a:solidFill>
         <a:effectLst/>
       </p:bgPr>
@@ -15461,7 +15461,7 @@
     <p:bg>
       <p:bgPr>
         <a:solidFill>
-          <a:srgbClr val="FFFFFF"/>
+          <a:srgbClr val="F5EDE3"/>
         </a:solidFill>
         <a:effectLst/>
       </p:bgPr>
@@ -16310,7 +16310,7 @@
     <p:bg>
       <p:bgPr>
         <a:solidFill>
-          <a:srgbClr val="FFFFFF"/>
+          <a:srgbClr val="F5EDE3"/>
         </a:solidFill>
         <a:effectLst/>
       </p:bgPr>
@@ -17163,7 +17163,7 @@
     <p:bg>
       <p:bgPr>
         <a:solidFill>
-          <a:srgbClr val="FFFFFF"/>
+          <a:srgbClr val="F5EDE3"/>
         </a:solidFill>
         <a:effectLst/>
       </p:bgPr>
@@ -17751,7 +17751,7 @@
     <p:bg>
       <p:bgPr>
         <a:solidFill>
-          <a:srgbClr val="FFFFFF"/>
+          <a:srgbClr val="F5EDE3"/>
         </a:solidFill>
         <a:effectLst/>
       </p:bgPr>
@@ -18100,7 +18100,7 @@
     <p:bg>
       <p:bgPr>
         <a:solidFill>
-          <a:srgbClr val="FFFFFF"/>
+          <a:srgbClr val="F5EDE3"/>
         </a:solidFill>
         <a:effectLst/>
       </p:bgPr>
@@ -18639,7 +18639,7 @@
     <p:bg>
       <p:bgPr>
         <a:solidFill>
-          <a:srgbClr val="FFFFFF"/>
+          <a:srgbClr val="F5EDE3"/>
         </a:solidFill>
         <a:effectLst/>
       </p:bgPr>
@@ -19222,7 +19222,7 @@
     <p:bg>
       <p:bgPr>
         <a:solidFill>
-          <a:srgbClr val="FFFFFF"/>
+          <a:srgbClr val="F5EDE3"/>
         </a:solidFill>
         <a:effectLst/>
       </p:bgPr>
@@ -19672,7 +19672,7 @@
     <p:bg>
       <p:bgPr>
         <a:solidFill>
-          <a:srgbClr val="FFFFFF"/>
+          <a:srgbClr val="F5EDE3"/>
         </a:solidFill>
         <a:effectLst/>
       </p:bgPr>
@@ -19985,7 +19985,7 @@
     <p:bg>
       <p:bgPr>
         <a:solidFill>
-          <a:srgbClr val="FFFFFF"/>
+          <a:srgbClr val="F5EDE3"/>
         </a:solidFill>
         <a:effectLst/>
       </p:bgPr>
